--- a/generated/Tier 1 Broker Scorecards/A.S.I.A Inc_Broker_Scorecard.pptx
+++ b/generated/Tier 1 Broker Scorecards/A.S.I.A Inc_Broker_Scorecard.pptx
@@ -3357,7 +3357,7 @@
                         <a:rPr sz="800">
                           <a:latin typeface="Segoe UI"/>
                         </a:rPr>
-                        <a:t>$2,385,931.63 / $3,982,556.54 / $1,993,074.24</a:t>
+                        <a:t>$2,385,931.63 / $3,983,106.54 / $1,993,624.24</a:t>
                       </a:r>
                     </a:p>
                   </a:txBody>
@@ -3394,7 +3394,7 @@
                         <a:rPr sz="900">
                           <a:latin typeface="Segoe UI"/>
                         </a:rPr>
-                        <a:t>Tier 1  |  6.86% / 15.00%</a:t>
+                        <a:t>Tier 1  |  6.63% / 15.00%</a:t>
                       </a:r>
                     </a:p>
                   </a:txBody>
@@ -3690,7 +3690,7 @@
                         <a:rPr sz="900">
                           <a:latin typeface="Segoe UI"/>
                         </a:rPr>
-                        <a:t>Fleet Bound Premium: $240,437.40</a:t>
+                        <a:t>Fleet Bound Premium: $85,123.46</a:t>
                       </a:r>
                     </a:p>
                   </a:txBody>
@@ -3727,7 +3727,7 @@
                         <a:rPr sz="900">
                           <a:latin typeface="Segoe UI"/>
                         </a:rPr>
-                        <a:t>Fleet Book %: 12.1%</a:t>
+                        <a:t>Fleet Book %: 4.3%</a:t>
                       </a:r>
                     </a:p>
                   </a:txBody>
@@ -3766,7 +3766,7 @@
                         <a:rPr sz="900">
                           <a:latin typeface="Segoe UI"/>
                         </a:rPr>
-                        <a:t>Non-Fleet Subs: 833  |  Binds: 61</a:t>
+                        <a:t>Non-Fleet Subs: 850  |  Binds: 60</a:t>
                       </a:r>
                     </a:p>
                   </a:txBody>
@@ -3803,7 +3803,7 @@
                         <a:rPr sz="900">
                           <a:latin typeface="Segoe UI"/>
                         </a:rPr>
-                        <a:t>Non-Fleet Bound Premium: $1,752,636.84</a:t>
+                        <a:t>Non-Fleet Bound Premium: $1,908,500.78</a:t>
                       </a:r>
                     </a:p>
                   </a:txBody>
@@ -3840,7 +3840,7 @@
                         <a:rPr sz="900">
                           <a:latin typeface="Segoe UI"/>
                         </a:rPr>
-                        <a:t>Non-Fleet Book %: 87.9%</a:t>
+                        <a:t>Non-Fleet Book %: 95.7%</a:t>
                       </a:r>
                     </a:p>
                   </a:txBody>
@@ -4428,7 +4428,7 @@
                           </a:solidFill>
                           <a:latin typeface="Segoe UI"/>
                         </a:rPr>
-                        <a:t>158</a:t>
+                        <a:t>176</a:t>
                       </a:r>
                     </a:p>
                   </a:txBody>
@@ -4624,7 +4624,7 @@
                           </a:solidFill>
                           <a:latin typeface="Segoe UI"/>
                         </a:rPr>
-                        <a:t>13.4%</a:t>
+                        <a:t>13.0%</a:t>
                       </a:r>
                     </a:p>
                   </a:txBody>
@@ -4707,7 +4707,7 @@
                           </a:solidFill>
                           <a:latin typeface="Segoe UI"/>
                         </a:rPr>
-                        <a:t>8.9%</a:t>
+                        <a:t>8.5%</a:t>
                       </a:r>
                     </a:p>
                   </a:txBody>
@@ -4906,7 +4906,7 @@
                           </a:solidFill>
                           <a:latin typeface="Segoe UI"/>
                         </a:rPr>
-                        <a:t>35</a:t>
+                        <a:t>34</a:t>
                       </a:r>
                     </a:p>
                   </a:txBody>
@@ -4983,7 +4983,7 @@
                           </a:solidFill>
                           <a:latin typeface="Segoe UI"/>
                         </a:rPr>
-                        <a:t>14</a:t>
+                        <a:t>15</a:t>
                       </a:r>
                     </a:p>
                   </a:txBody>
@@ -5262,7 +5262,7 @@
                           </a:solidFill>
                           <a:latin typeface="Segoe UI"/>
                         </a:rPr>
-                        <a:t>$223.7K</a:t>
+                        <a:t>$224.3K</a:t>
                       </a:r>
                     </a:p>
                   </a:txBody>

--- a/generated/Tier 1 Broker Scorecards/A.S.I.A Inc_Broker_Scorecard.pptx
+++ b/generated/Tier 1 Broker Scorecards/A.S.I.A Inc_Broker_Scorecard.pptx
@@ -3394,7 +3394,7 @@
                         <a:rPr sz="900">
                           <a:latin typeface="Segoe UI"/>
                         </a:rPr>
-                        <a:t>Tier 1  |  6.63% / 15.00%</a:t>
+                        <a:t>Tier 1  |  6.67% / 15.00%</a:t>
                       </a:r>
                     </a:p>
                   </a:txBody>
@@ -3690,7 +3690,7 @@
                         <a:rPr sz="900">
                           <a:latin typeface="Segoe UI"/>
                         </a:rPr>
-                        <a:t>Fleet Bound Premium: $85,123.46</a:t>
+                        <a:t>Fleet Bound Premium: $82,948.70</a:t>
                       </a:r>
                     </a:p>
                   </a:txBody>
@@ -3727,7 +3727,7 @@
                         <a:rPr sz="900">
                           <a:latin typeface="Segoe UI"/>
                         </a:rPr>
-                        <a:t>Fleet Book %: 4.3%</a:t>
+                        <a:t>Fleet Book %: 4.2%</a:t>
                       </a:r>
                     </a:p>
                   </a:txBody>
@@ -3766,7 +3766,7 @@
                         <a:rPr sz="900">
                           <a:latin typeface="Segoe UI"/>
                         </a:rPr>
-                        <a:t>Non-Fleet Subs: 850  |  Binds: 60</a:t>
+                        <a:t>Non-Fleet Subs: 859  |  Binds: 61</a:t>
                       </a:r>
                     </a:p>
                   </a:txBody>
@@ -3803,7 +3803,7 @@
                         <a:rPr sz="900">
                           <a:latin typeface="Segoe UI"/>
                         </a:rPr>
-                        <a:t>Non-Fleet Bound Premium: $1,908,500.78</a:t>
+                        <a:t>Non-Fleet Bound Premium: $1,910,675.54</a:t>
                       </a:r>
                     </a:p>
                   </a:txBody>
@@ -3840,7 +3840,7 @@
                         <a:rPr sz="900">
                           <a:latin typeface="Segoe UI"/>
                         </a:rPr>
-                        <a:t>Non-Fleet Book %: 95.7%</a:t>
+                        <a:t>Non-Fleet Book %: 95.8%</a:t>
                       </a:r>
                     </a:p>
                   </a:txBody>
@@ -4428,7 +4428,7 @@
                           </a:solidFill>
                           <a:latin typeface="Segoe UI"/>
                         </a:rPr>
-                        <a:t>176</a:t>
+                        <a:t>188</a:t>
                       </a:r>
                     </a:p>
                   </a:txBody>
@@ -4624,7 +4624,7 @@
                           </a:solidFill>
                           <a:latin typeface="Segoe UI"/>
                         </a:rPr>
-                        <a:t>13.0%</a:t>
+                        <a:t>13.7%</a:t>
                       </a:r>
                     </a:p>
                   </a:txBody>
@@ -4664,7 +4664,7 @@
                         <a:rPr sz="800">
                           <a:latin typeface="Segoe UI"/>
                         </a:rPr>
-                        <a:t>27.3%</a:t>
+                        <a:t>25.0%</a:t>
                       </a:r>
                     </a:p>
                   </a:txBody>
@@ -4707,7 +4707,7 @@
                           </a:solidFill>
                           <a:latin typeface="Segoe UI"/>
                         </a:rPr>
-                        <a:t>8.5%</a:t>
+                        <a:t>7.4%</a:t>
                       </a:r>
                     </a:p>
                   </a:txBody>
@@ -4906,7 +4906,7 @@
                           </a:solidFill>
                           <a:latin typeface="Segoe UI"/>
                         </a:rPr>
-                        <a:t>34</a:t>
+                        <a:t>36</a:t>
                       </a:r>
                     </a:p>
                   </a:txBody>
@@ -4943,7 +4943,7 @@
                         <a:rPr sz="800">
                           <a:latin typeface="Segoe UI"/>
                         </a:rPr>
-                        <a:t>12</a:t>
+                        <a:t>11</a:t>
                       </a:r>
                     </a:p>
                   </a:txBody>
@@ -4983,7 +4983,7 @@
                           </a:solidFill>
                           <a:latin typeface="Segoe UI"/>
                         </a:rPr>
-                        <a:t>15</a:t>
+                        <a:t>14</a:t>
                       </a:r>
                     </a:p>
                   </a:txBody>

--- a/generated/Tier 1 Broker Scorecards/A.S.I.A Inc_Broker_Scorecard.pptx
+++ b/generated/Tier 1 Broker Scorecards/A.S.I.A Inc_Broker_Scorecard.pptx
@@ -3357,7 +3357,7 @@
                         <a:rPr sz="800">
                           <a:latin typeface="Segoe UI"/>
                         </a:rPr>
-                        <a:t>$2,385,931.63 / $3,983,106.54 / $1,993,624.24</a:t>
+                        <a:t>$2,385,931.63 / $4,073,285.15 / $2,083,802.85</a:t>
                       </a:r>
                     </a:p>
                   </a:txBody>
@@ -3394,7 +3394,7 @@
                         <a:rPr sz="900">
                           <a:latin typeface="Segoe UI"/>
                         </a:rPr>
-                        <a:t>Tier 1  |  6.67% / 15.00%</a:t>
+                        <a:t>Tier 1  |  6.69% / 15.00%</a:t>
                       </a:r>
                     </a:p>
                   </a:txBody>
@@ -3431,7 +3431,7 @@
                         <a:rPr sz="900">
                           <a:latin typeface="Segoe UI"/>
                         </a:rPr>
-                        <a:t>$3,340,304.28  (59.7% achieved)</a:t>
+                        <a:t>$3,340,304.28  (62.4% achieved)</a:t>
                       </a:r>
                     </a:p>
                   </a:txBody>
@@ -3653,7 +3653,7 @@
                         <a:rPr sz="900">
                           <a:latin typeface="Segoe UI"/>
                         </a:rPr>
-                        <a:t>Fleet Subs: 85  |  Binds: 2</a:t>
+                        <a:t>Fleet Subs: 87  |  Binds: 2</a:t>
                       </a:r>
                     </a:p>
                   </a:txBody>
@@ -3690,7 +3690,7 @@
                         <a:rPr sz="900">
                           <a:latin typeface="Segoe UI"/>
                         </a:rPr>
-                        <a:t>Fleet Bound Premium: $82,948.70</a:t>
+                        <a:t>Fleet Bound Premium: $88,451.69</a:t>
                       </a:r>
                     </a:p>
                   </a:txBody>
@@ -3766,7 +3766,7 @@
                         <a:rPr sz="900">
                           <a:latin typeface="Segoe UI"/>
                         </a:rPr>
-                        <a:t>Non-Fleet Subs: 859  |  Binds: 61</a:t>
+                        <a:t>Non-Fleet Subs: 869  |  Binds: 62</a:t>
                       </a:r>
                     </a:p>
                   </a:txBody>
@@ -3803,7 +3803,7 @@
                         <a:rPr sz="900">
                           <a:latin typeface="Segoe UI"/>
                         </a:rPr>
-                        <a:t>Non-Fleet Bound Premium: $1,910,675.54</a:t>
+                        <a:t>Non-Fleet Bound Premium: $1,995,351.16</a:t>
                       </a:r>
                     </a:p>
                   </a:txBody>
@@ -4428,7 +4428,7 @@
                           </a:solidFill>
                           <a:latin typeface="Segoe UI"/>
                         </a:rPr>
-                        <a:t>188</a:t>
+                        <a:t>200</a:t>
                       </a:r>
                     </a:p>
                   </a:txBody>
@@ -4624,7 +4624,7 @@
                           </a:solidFill>
                           <a:latin typeface="Segoe UI"/>
                         </a:rPr>
-                        <a:t>13.7%</a:t>
+                        <a:t>14.1%</a:t>
                       </a:r>
                     </a:p>
                   </a:txBody>
@@ -4664,7 +4664,7 @@
                         <a:rPr sz="800">
                           <a:latin typeface="Segoe UI"/>
                         </a:rPr>
-                        <a:t>25.0%</a:t>
+                        <a:t>27.3%</a:t>
                       </a:r>
                     </a:p>
                   </a:txBody>
@@ -4707,7 +4707,7 @@
                           </a:solidFill>
                           <a:latin typeface="Segoe UI"/>
                         </a:rPr>
-                        <a:t>7.4%</a:t>
+                        <a:t>6.5%</a:t>
                       </a:r>
                     </a:p>
                   </a:txBody>
@@ -4906,7 +4906,7 @@
                           </a:solidFill>
                           <a:latin typeface="Segoe UI"/>
                         </a:rPr>
-                        <a:t>36</a:t>
+                        <a:t>37</a:t>
                       </a:r>
                     </a:p>
                   </a:txBody>
@@ -4943,7 +4943,7 @@
                         <a:rPr sz="800">
                           <a:latin typeface="Segoe UI"/>
                         </a:rPr>
-                        <a:t>11</a:t>
+                        <a:t>12</a:t>
                       </a:r>
                     </a:p>
                   </a:txBody>
@@ -4983,7 +4983,7 @@
                           </a:solidFill>
                           <a:latin typeface="Segoe UI"/>
                         </a:rPr>
-                        <a:t>14</a:t>
+                        <a:t>13</a:t>
                       </a:r>
                     </a:p>
                   </a:txBody>
@@ -5262,7 +5262,7 @@
                           </a:solidFill>
                           <a:latin typeface="Segoe UI"/>
                         </a:rPr>
-                        <a:t>$224.3K</a:t>
+                        <a:t>$314.4K</a:t>
                       </a:r>
                     </a:p>
                   </a:txBody>

--- a/generated/Tier 1 Broker Scorecards/A.S.I.A Inc_Broker_Scorecard.pptx
+++ b/generated/Tier 1 Broker Scorecards/A.S.I.A Inc_Broker_Scorecard.pptx
@@ -3357,7 +3357,7 @@
                         <a:rPr sz="800">
                           <a:latin typeface="Segoe UI"/>
                         </a:rPr>
-                        <a:t>$2,385,931.63 / $4,073,285.15 / $2,083,802.85</a:t>
+                        <a:t>$2,385,931.63 / $4,114,471.08 / $2,124,988.78</a:t>
                       </a:r>
                     </a:p>
                   </a:txBody>
@@ -3394,7 +3394,7 @@
                         <a:rPr sz="900">
                           <a:latin typeface="Segoe UI"/>
                         </a:rPr>
-                        <a:t>Tier 1  |  6.69% / 15.00%</a:t>
+                        <a:t>Tier 1  |  6.97% / 15.00%</a:t>
                       </a:r>
                     </a:p>
                   </a:txBody>
@@ -3431,7 +3431,7 @@
                         <a:rPr sz="900">
                           <a:latin typeface="Segoe UI"/>
                         </a:rPr>
-                        <a:t>$3,340,304.28  (62.4% achieved)</a:t>
+                        <a:t>$3,340,304.28  (63.6% achieved)</a:t>
                       </a:r>
                     </a:p>
                   </a:txBody>
@@ -3653,7 +3653,7 @@
                         <a:rPr sz="900">
                           <a:latin typeface="Segoe UI"/>
                         </a:rPr>
-                        <a:t>Fleet Subs: 87  |  Binds: 2</a:t>
+                        <a:t>Fleet Subs: 87  |  Binds: 3</a:t>
                       </a:r>
                     </a:p>
                   </a:txBody>
@@ -3690,7 +3690,7 @@
                         <a:rPr sz="900">
                           <a:latin typeface="Segoe UI"/>
                         </a:rPr>
-                        <a:t>Fleet Bound Premium: $88,451.69</a:t>
+                        <a:t>Fleet Bound Premium: $201,233.50</a:t>
                       </a:r>
                     </a:p>
                   </a:txBody>
@@ -3727,7 +3727,7 @@
                         <a:rPr sz="900">
                           <a:latin typeface="Segoe UI"/>
                         </a:rPr>
-                        <a:t>Fleet Book %: 4.2%</a:t>
+                        <a:t>Fleet Book %: 9.5%</a:t>
                       </a:r>
                     </a:p>
                   </a:txBody>
@@ -3766,7 +3766,7 @@
                         <a:rPr sz="900">
                           <a:latin typeface="Segoe UI"/>
                         </a:rPr>
-                        <a:t>Non-Fleet Subs: 869  |  Binds: 62</a:t>
+                        <a:t>Non-Fleet Subs: 874  |  Binds: 64</a:t>
                       </a:r>
                     </a:p>
                   </a:txBody>
@@ -3803,7 +3803,7 @@
                         <a:rPr sz="900">
                           <a:latin typeface="Segoe UI"/>
                         </a:rPr>
-                        <a:t>Non-Fleet Bound Premium: $1,995,351.16</a:t>
+                        <a:t>Non-Fleet Bound Premium: $1,923,755.28</a:t>
                       </a:r>
                     </a:p>
                   </a:txBody>
@@ -3840,7 +3840,7 @@
                         <a:rPr sz="900">
                           <a:latin typeface="Segoe UI"/>
                         </a:rPr>
-                        <a:t>Non-Fleet Book %: 95.8%</a:t>
+                        <a:t>Non-Fleet Book %: 90.5%</a:t>
                       </a:r>
                     </a:p>
                   </a:txBody>
@@ -4428,7 +4428,7 @@
                           </a:solidFill>
                           <a:latin typeface="Segoe UI"/>
                         </a:rPr>
-                        <a:t>200</a:t>
+                        <a:t>205</a:t>
                       </a:r>
                     </a:p>
                   </a:txBody>
@@ -4707,7 +4707,7 @@
                           </a:solidFill>
                           <a:latin typeface="Segoe UI"/>
                         </a:rPr>
-                        <a:t>6.5%</a:t>
+                        <a:t>7.8%</a:t>
                       </a:r>
                     </a:p>
                   </a:txBody>
@@ -4983,7 +4983,7 @@
                           </a:solidFill>
                           <a:latin typeface="Segoe UI"/>
                         </a:rPr>
-                        <a:t>13</a:t>
+                        <a:t>16</a:t>
                       </a:r>
                     </a:p>
                   </a:txBody>
@@ -5262,7 +5262,7 @@
                           </a:solidFill>
                           <a:latin typeface="Segoe UI"/>
                         </a:rPr>
-                        <a:t>$314.4K</a:t>
+                        <a:t>$355.6K</a:t>
                       </a:r>
                     </a:p>
                   </a:txBody>

--- a/generated/Tier 1 Broker Scorecards/A.S.I.A Inc_Broker_Scorecard.pptx
+++ b/generated/Tier 1 Broker Scorecards/A.S.I.A Inc_Broker_Scorecard.pptx
@@ -3394,7 +3394,7 @@
                         <a:rPr sz="900">
                           <a:latin typeface="Segoe UI"/>
                         </a:rPr>
-                        <a:t>Tier 1  |  6.97% / 15.00%</a:t>
+                        <a:t>Tier 1  |  6.68% / 15.00%</a:t>
                       </a:r>
                     </a:p>
                   </a:txBody>
@@ -3690,7 +3690,7 @@
                         <a:rPr sz="900">
                           <a:latin typeface="Segoe UI"/>
                         </a:rPr>
-                        <a:t>Fleet Bound Premium: $201,233.50</a:t>
+                        <a:t>Fleet Bound Premium: $211,220.06</a:t>
                       </a:r>
                     </a:p>
                   </a:txBody>
@@ -3727,7 +3727,7 @@
                         <a:rPr sz="900">
                           <a:latin typeface="Segoe UI"/>
                         </a:rPr>
-                        <a:t>Fleet Book %: 9.5%</a:t>
+                        <a:t>Fleet Book %: 9.9%</a:t>
                       </a:r>
                     </a:p>
                   </a:txBody>
@@ -3766,7 +3766,7 @@
                         <a:rPr sz="900">
                           <a:latin typeface="Segoe UI"/>
                         </a:rPr>
-                        <a:t>Non-Fleet Subs: 874  |  Binds: 64</a:t>
+                        <a:t>Non-Fleet Subs: 886  |  Binds: 62</a:t>
                       </a:r>
                     </a:p>
                   </a:txBody>
@@ -3803,7 +3803,7 @@
                         <a:rPr sz="900">
                           <a:latin typeface="Segoe UI"/>
                         </a:rPr>
-                        <a:t>Non-Fleet Bound Premium: $1,923,755.28</a:t>
+                        <a:t>Non-Fleet Bound Premium: $1,913,768.72</a:t>
                       </a:r>
                     </a:p>
                   </a:txBody>
@@ -3840,7 +3840,7 @@
                         <a:rPr sz="900">
                           <a:latin typeface="Segoe UI"/>
                         </a:rPr>
-                        <a:t>Non-Fleet Book %: 90.5%</a:t>
+                        <a:t>Non-Fleet Book %: 90.1%</a:t>
                       </a:r>
                     </a:p>
                   </a:txBody>
@@ -4428,7 +4428,7 @@
                           </a:solidFill>
                           <a:latin typeface="Segoe UI"/>
                         </a:rPr>
-                        <a:t>205</a:t>
+                        <a:t>218</a:t>
                       </a:r>
                     </a:p>
                   </a:txBody>
@@ -4624,7 +4624,7 @@
                           </a:solidFill>
                           <a:latin typeface="Segoe UI"/>
                         </a:rPr>
-                        <a:t>14.1%</a:t>
+                        <a:t>13.7%</a:t>
                       </a:r>
                     </a:p>
                   </a:txBody>
@@ -4664,7 +4664,7 @@
                         <a:rPr sz="800">
                           <a:latin typeface="Segoe UI"/>
                         </a:rPr>
-                        <a:t>27.3%</a:t>
+                        <a:t>25.0%</a:t>
                       </a:r>
                     </a:p>
                   </a:txBody>
@@ -4906,7 +4906,7 @@
                           </a:solidFill>
                           <a:latin typeface="Segoe UI"/>
                         </a:rPr>
-                        <a:t>37</a:t>
+                        <a:t>36</a:t>
                       </a:r>
                     </a:p>
                   </a:txBody>
@@ -4943,7 +4943,7 @@
                         <a:rPr sz="800">
                           <a:latin typeface="Segoe UI"/>
                         </a:rPr>
-                        <a:t>12</a:t>
+                        <a:t>11</a:t>
                       </a:r>
                     </a:p>
                   </a:txBody>
@@ -4983,7 +4983,7 @@
                           </a:solidFill>
                           <a:latin typeface="Segoe UI"/>
                         </a:rPr>
-                        <a:t>16</a:t>
+                        <a:t>17</a:t>
                       </a:r>
                     </a:p>
                   </a:txBody>

--- a/generated/Tier 1 Broker Scorecards/A.S.I.A Inc_Broker_Scorecard.pptx
+++ b/generated/Tier 1 Broker Scorecards/A.S.I.A Inc_Broker_Scorecard.pptx
@@ -3394,7 +3394,7 @@
                         <a:rPr sz="900">
                           <a:latin typeface="Segoe UI"/>
                         </a:rPr>
-                        <a:t>Tier 1  |  6.68% / 15.00%</a:t>
+                        <a:t>Tier 1  |  6.66% / 15.00%</a:t>
                       </a:r>
                     </a:p>
                   </a:txBody>
@@ -3690,7 +3690,7 @@
                         <a:rPr sz="900">
                           <a:latin typeface="Segoe UI"/>
                         </a:rPr>
-                        <a:t>Fleet Bound Premium: $211,220.06</a:t>
+                        <a:t>Fleet Bound Premium: $210,999.50</a:t>
                       </a:r>
                     </a:p>
                   </a:txBody>
@@ -3766,7 +3766,7 @@
                         <a:rPr sz="900">
                           <a:latin typeface="Segoe UI"/>
                         </a:rPr>
-                        <a:t>Non-Fleet Subs: 886  |  Binds: 62</a:t>
+                        <a:t>Non-Fleet Subs: 889  |  Binds: 62</a:t>
                       </a:r>
                     </a:p>
                   </a:txBody>
@@ -3803,7 +3803,7 @@
                         <a:rPr sz="900">
                           <a:latin typeface="Segoe UI"/>
                         </a:rPr>
-                        <a:t>Non-Fleet Bound Premium: $1,913,768.72</a:t>
+                        <a:t>Non-Fleet Bound Premium: $1,913,989.28</a:t>
                       </a:r>
                     </a:p>
                   </a:txBody>
@@ -4428,7 +4428,7 @@
                           </a:solidFill>
                           <a:latin typeface="Segoe UI"/>
                         </a:rPr>
-                        <a:t>218</a:t>
+                        <a:t>221</a:t>
                       </a:r>
                     </a:p>
                   </a:txBody>
@@ -4624,7 +4624,7 @@
                           </a:solidFill>
                           <a:latin typeface="Segoe UI"/>
                         </a:rPr>
-                        <a:t>13.7%</a:t>
+                        <a:t>14.1%</a:t>
                       </a:r>
                     </a:p>
                   </a:txBody>
@@ -4664,7 +4664,7 @@
                         <a:rPr sz="800">
                           <a:latin typeface="Segoe UI"/>
                         </a:rPr>
-                        <a:t>25.0%</a:t>
+                        <a:t>27.3%</a:t>
                       </a:r>
                     </a:p>
                   </a:txBody>
@@ -4707,7 +4707,7 @@
                           </a:solidFill>
                           <a:latin typeface="Segoe UI"/>
                         </a:rPr>
-                        <a:t>7.8%</a:t>
+                        <a:t>7.7%</a:t>
                       </a:r>
                     </a:p>
                   </a:txBody>
@@ -4906,7 +4906,7 @@
                           </a:solidFill>
                           <a:latin typeface="Segoe UI"/>
                         </a:rPr>
-                        <a:t>36</a:t>
+                        <a:t>37</a:t>
                       </a:r>
                     </a:p>
                   </a:txBody>
@@ -4943,7 +4943,7 @@
                         <a:rPr sz="800">
                           <a:latin typeface="Segoe UI"/>
                         </a:rPr>
-                        <a:t>11</a:t>
+                        <a:t>12</a:t>
                       </a:r>
                     </a:p>
                   </a:txBody>

--- a/generated/Tier 1 Broker Scorecards/A.S.I.A Inc_Broker_Scorecard.pptx
+++ b/generated/Tier 1 Broker Scorecards/A.S.I.A Inc_Broker_Scorecard.pptx
@@ -3394,7 +3394,7 @@
                         <a:rPr sz="900">
                           <a:latin typeface="Segoe UI"/>
                         </a:rPr>
-                        <a:t>Tier 1  |  6.66% / 15.00%</a:t>
+                        <a:t>Tier 1  |  6.56% / 15.00%</a:t>
                       </a:r>
                     </a:p>
                   </a:txBody>
@@ -3690,7 +3690,7 @@
                         <a:rPr sz="900">
                           <a:latin typeface="Segoe UI"/>
                         </a:rPr>
-                        <a:t>Fleet Bound Premium: $210,999.50</a:t>
+                        <a:t>Fleet Bound Premium: $213,891.06</a:t>
                       </a:r>
                     </a:p>
                   </a:txBody>
@@ -3727,7 +3727,7 @@
                         <a:rPr sz="900">
                           <a:latin typeface="Segoe UI"/>
                         </a:rPr>
-                        <a:t>Fleet Book %: 9.9%</a:t>
+                        <a:t>Fleet Book %: 10.1%</a:t>
                       </a:r>
                     </a:p>
                   </a:txBody>
@@ -3766,7 +3766,7 @@
                         <a:rPr sz="900">
                           <a:latin typeface="Segoe UI"/>
                         </a:rPr>
-                        <a:t>Non-Fleet Subs: 889  |  Binds: 62</a:t>
+                        <a:t>Non-Fleet Subs: 889  |  Binds: 61</a:t>
                       </a:r>
                     </a:p>
                   </a:txBody>
@@ -3803,7 +3803,7 @@
                         <a:rPr sz="900">
                           <a:latin typeface="Segoe UI"/>
                         </a:rPr>
-                        <a:t>Non-Fleet Bound Premium: $1,913,989.28</a:t>
+                        <a:t>Non-Fleet Bound Premium: $1,911,097.72</a:t>
                       </a:r>
                     </a:p>
                   </a:txBody>
@@ -3840,7 +3840,7 @@
                         <a:rPr sz="900">
                           <a:latin typeface="Segoe UI"/>
                         </a:rPr>
-                        <a:t>Non-Fleet Book %: 90.1%</a:t>
+                        <a:t>Non-Fleet Book %: 89.9%</a:t>
                       </a:r>
                     </a:p>
                   </a:txBody>
@@ -4624,7 +4624,7 @@
                           </a:solidFill>
                           <a:latin typeface="Segoe UI"/>
                         </a:rPr>
-                        <a:t>14.1%</a:t>
+                        <a:t>13.7%</a:t>
                       </a:r>
                     </a:p>
                   </a:txBody>
@@ -4906,7 +4906,7 @@
                           </a:solidFill>
                           <a:latin typeface="Segoe UI"/>
                         </a:rPr>
-                        <a:t>37</a:t>
+                        <a:t>36</a:t>
                       </a:r>
                     </a:p>
                   </a:txBody>

--- a/generated/Tier 1 Broker Scorecards/A.S.I.A Inc_Broker_Scorecard.pptx
+++ b/generated/Tier 1 Broker Scorecards/A.S.I.A Inc_Broker_Scorecard.pptx
@@ -3394,7 +3394,7 @@
                         <a:rPr sz="900">
                           <a:latin typeface="Segoe UI"/>
                         </a:rPr>
-                        <a:t>Tier 1  |  6.56% / 15.00%</a:t>
+                        <a:t>Tier 1  |  6.76% / 15.00%</a:t>
                       </a:r>
                     </a:p>
                   </a:txBody>
@@ -3653,7 +3653,7 @@
                         <a:rPr sz="900">
                           <a:latin typeface="Segoe UI"/>
                         </a:rPr>
-                        <a:t>Fleet Subs: 87  |  Binds: 3</a:t>
+                        <a:t>Fleet Subs: 86  |  Binds: 3</a:t>
                       </a:r>
                     </a:p>
                   </a:txBody>
@@ -3690,7 +3690,7 @@
                         <a:rPr sz="900">
                           <a:latin typeface="Segoe UI"/>
                         </a:rPr>
-                        <a:t>Fleet Bound Premium: $213,891.06</a:t>
+                        <a:t>Fleet Bound Premium: $201,432.69</a:t>
                       </a:r>
                     </a:p>
                   </a:txBody>
@@ -3727,7 +3727,7 @@
                         <a:rPr sz="900">
                           <a:latin typeface="Segoe UI"/>
                         </a:rPr>
-                        <a:t>Fleet Book %: 10.1%</a:t>
+                        <a:t>Fleet Book %: 9.5%</a:t>
                       </a:r>
                     </a:p>
                   </a:txBody>
@@ -3766,7 +3766,7 @@
                         <a:rPr sz="900">
                           <a:latin typeface="Segoe UI"/>
                         </a:rPr>
-                        <a:t>Non-Fleet Subs: 889  |  Binds: 61</a:t>
+                        <a:t>Non-Fleet Subs: 890  |  Binds: 63</a:t>
                       </a:r>
                     </a:p>
                   </a:txBody>
@@ -3803,7 +3803,7 @@
                         <a:rPr sz="900">
                           <a:latin typeface="Segoe UI"/>
                         </a:rPr>
-                        <a:t>Non-Fleet Bound Premium: $1,911,097.72</a:t>
+                        <a:t>Non-Fleet Bound Premium: $1,923,556.09</a:t>
                       </a:r>
                     </a:p>
                   </a:txBody>
@@ -3840,7 +3840,7 @@
                         <a:rPr sz="900">
                           <a:latin typeface="Segoe UI"/>
                         </a:rPr>
-                        <a:t>Non-Fleet Book %: 89.9%</a:t>
+                        <a:t>Non-Fleet Book %: 90.5%</a:t>
                       </a:r>
                     </a:p>
                   </a:txBody>
@@ -4624,7 +4624,7 @@
                           </a:solidFill>
                           <a:latin typeface="Segoe UI"/>
                         </a:rPr>
-                        <a:t>13.7%</a:t>
+                        <a:t>14.1%</a:t>
                       </a:r>
                     </a:p>
                   </a:txBody>
@@ -4906,7 +4906,7 @@
                           </a:solidFill>
                           <a:latin typeface="Segoe UI"/>
                         </a:rPr>
-                        <a:t>36</a:t>
+                        <a:t>37</a:t>
                       </a:r>
                     </a:p>
                   </a:txBody>

--- a/generated/Tier 1 Broker Scorecards/A.S.I.A Inc_Broker_Scorecard.pptx
+++ b/generated/Tier 1 Broker Scorecards/A.S.I.A Inc_Broker_Scorecard.pptx
@@ -3394,7 +3394,7 @@
                         <a:rPr sz="900">
                           <a:latin typeface="Segoe UI"/>
                         </a:rPr>
-                        <a:t>Tier 1  |  6.76% / 15.00%</a:t>
+                        <a:t>Tier 1  |  6.58% / 15.00%</a:t>
                       </a:r>
                     </a:p>
                   </a:txBody>
@@ -3653,7 +3653,7 @@
                         <a:rPr sz="900">
                           <a:latin typeface="Segoe UI"/>
                         </a:rPr>
-                        <a:t>Fleet Subs: 86  |  Binds: 3</a:t>
+                        <a:t>Fleet Subs: 88  |  Binds: 3</a:t>
                       </a:r>
                     </a:p>
                   </a:txBody>
@@ -3690,7 +3690,7 @@
                         <a:rPr sz="900">
                           <a:latin typeface="Segoe UI"/>
                         </a:rPr>
-                        <a:t>Fleet Bound Premium: $201,432.69</a:t>
+                        <a:t>Fleet Bound Premium: $207,145.88</a:t>
                       </a:r>
                     </a:p>
                   </a:txBody>
@@ -3727,7 +3727,7 @@
                         <a:rPr sz="900">
                           <a:latin typeface="Segoe UI"/>
                         </a:rPr>
-                        <a:t>Fleet Book %: 9.5%</a:t>
+                        <a:t>Fleet Book %: 9.7%</a:t>
                       </a:r>
                     </a:p>
                   </a:txBody>
@@ -3766,7 +3766,7 @@
                         <a:rPr sz="900">
                           <a:latin typeface="Segoe UI"/>
                         </a:rPr>
-                        <a:t>Non-Fleet Subs: 890  |  Binds: 63</a:t>
+                        <a:t>Non-Fleet Subs: 900  |  Binds: 62</a:t>
                       </a:r>
                     </a:p>
                   </a:txBody>
@@ -3803,7 +3803,7 @@
                         <a:rPr sz="900">
                           <a:latin typeface="Segoe UI"/>
                         </a:rPr>
-                        <a:t>Non-Fleet Bound Premium: $1,923,556.09</a:t>
+                        <a:t>Non-Fleet Bound Premium: $1,917,842.90</a:t>
                       </a:r>
                     </a:p>
                   </a:txBody>
@@ -3840,7 +3840,7 @@
                         <a:rPr sz="900">
                           <a:latin typeface="Segoe UI"/>
                         </a:rPr>
-                        <a:t>Non-Fleet Book %: 90.5%</a:t>
+                        <a:t>Non-Fleet Book %: 90.3%</a:t>
                       </a:r>
                     </a:p>
                   </a:txBody>
@@ -4428,7 +4428,7 @@
                           </a:solidFill>
                           <a:latin typeface="Segoe UI"/>
                         </a:rPr>
-                        <a:t>221</a:t>
+                        <a:t>233</a:t>
                       </a:r>
                     </a:p>
                   </a:txBody>
@@ -4624,7 +4624,7 @@
                           </a:solidFill>
                           <a:latin typeface="Segoe UI"/>
                         </a:rPr>
-                        <a:t>14.1%</a:t>
+                        <a:t>14.5%</a:t>
                       </a:r>
                     </a:p>
                   </a:txBody>
@@ -4707,7 +4707,7 @@
                           </a:solidFill>
                           <a:latin typeface="Segoe UI"/>
                         </a:rPr>
-                        <a:t>7.7%</a:t>
+                        <a:t>7.3%</a:t>
                       </a:r>
                     </a:p>
                   </a:txBody>
@@ -4906,7 +4906,7 @@
                           </a:solidFill>
                           <a:latin typeface="Segoe UI"/>
                         </a:rPr>
-                        <a:t>37</a:t>
+                        <a:t>38</a:t>
                       </a:r>
                     </a:p>
                   </a:txBody>

--- a/generated/Tier 1 Broker Scorecards/A.S.I.A Inc_Broker_Scorecard.pptx
+++ b/generated/Tier 1 Broker Scorecards/A.S.I.A Inc_Broker_Scorecard.pptx
@@ -3357,7 +3357,7 @@
                         <a:rPr sz="800">
                           <a:latin typeface="Segoe UI"/>
                         </a:rPr>
-                        <a:t>$2,385,931.63 / $4,114,471.08 / $2,124,988.78</a:t>
+                        <a:t>$2,385,931.63 / $4,118,842.27 / $2,129,359.97</a:t>
                       </a:r>
                     </a:p>
                   </a:txBody>
@@ -3394,7 +3394,7 @@
                         <a:rPr sz="900">
                           <a:latin typeface="Segoe UI"/>
                         </a:rPr>
-                        <a:t>Tier 1  |  6.58% / 15.00%</a:t>
+                        <a:t>Tier 1  |  6.45% / 15.00%</a:t>
                       </a:r>
                     </a:p>
                   </a:txBody>
@@ -3431,7 +3431,7 @@
                         <a:rPr sz="900">
                           <a:latin typeface="Segoe UI"/>
                         </a:rPr>
-                        <a:t>$3,340,304.28  (63.6% achieved)</a:t>
+                        <a:t>$3,340,304.28  (63.7% achieved)</a:t>
                       </a:r>
                     </a:p>
                   </a:txBody>
@@ -3690,7 +3690,7 @@
                         <a:rPr sz="900">
                           <a:latin typeface="Segoe UI"/>
                         </a:rPr>
-                        <a:t>Fleet Bound Premium: $207,145.88</a:t>
+                        <a:t>Fleet Bound Premium: $209,200.82</a:t>
                       </a:r>
                     </a:p>
                   </a:txBody>
@@ -3727,7 +3727,7 @@
                         <a:rPr sz="900">
                           <a:latin typeface="Segoe UI"/>
                         </a:rPr>
-                        <a:t>Fleet Book %: 9.7%</a:t>
+                        <a:t>Fleet Book %: 9.8%</a:t>
                       </a:r>
                     </a:p>
                   </a:txBody>
@@ -3766,7 +3766,7 @@
                         <a:rPr sz="900">
                           <a:latin typeface="Segoe UI"/>
                         </a:rPr>
-                        <a:t>Non-Fleet Subs: 900  |  Binds: 62</a:t>
+                        <a:t>Non-Fleet Subs: 905  |  Binds: 61</a:t>
                       </a:r>
                     </a:p>
                   </a:txBody>
@@ -3803,7 +3803,7 @@
                         <a:rPr sz="900">
                           <a:latin typeface="Segoe UI"/>
                         </a:rPr>
-                        <a:t>Non-Fleet Bound Premium: $1,917,842.90</a:t>
+                        <a:t>Non-Fleet Bound Premium: $1,920,159.15</a:t>
                       </a:r>
                     </a:p>
                   </a:txBody>
@@ -3840,7 +3840,7 @@
                         <a:rPr sz="900">
                           <a:latin typeface="Segoe UI"/>
                         </a:rPr>
-                        <a:t>Non-Fleet Book %: 90.3%</a:t>
+                        <a:t>Non-Fleet Book %: 90.2%</a:t>
                       </a:r>
                     </a:p>
                   </a:txBody>
@@ -4428,7 +4428,7 @@
                           </a:solidFill>
                           <a:latin typeface="Segoe UI"/>
                         </a:rPr>
-                        <a:t>233</a:t>
+                        <a:t>240</a:t>
                       </a:r>
                     </a:p>
                   </a:txBody>
@@ -4624,7 +4624,7 @@
                           </a:solidFill>
                           <a:latin typeface="Segoe UI"/>
                         </a:rPr>
-                        <a:t>14.5%</a:t>
+                        <a:t>13.7%</a:t>
                       </a:r>
                     </a:p>
                   </a:txBody>
@@ -4707,7 +4707,7 @@
                           </a:solidFill>
                           <a:latin typeface="Segoe UI"/>
                         </a:rPr>
-                        <a:t>7.3%</a:t>
+                        <a:t>7.5%</a:t>
                       </a:r>
                     </a:p>
                   </a:txBody>
@@ -4906,7 +4906,7 @@
                           </a:solidFill>
                           <a:latin typeface="Segoe UI"/>
                         </a:rPr>
-                        <a:t>38</a:t>
+                        <a:t>36</a:t>
                       </a:r>
                     </a:p>
                   </a:txBody>
@@ -4983,7 +4983,7 @@
                           </a:solidFill>
                           <a:latin typeface="Segoe UI"/>
                         </a:rPr>
-                        <a:t>17</a:t>
+                        <a:t>18</a:t>
                       </a:r>
                     </a:p>
                   </a:txBody>
@@ -5262,7 +5262,7 @@
                           </a:solidFill>
                           <a:latin typeface="Segoe UI"/>
                         </a:rPr>
-                        <a:t>$355.6K</a:t>
+                        <a:t>$360.0K</a:t>
                       </a:r>
                     </a:p>
                   </a:txBody>

--- a/generated/Tier 1 Broker Scorecards/A.S.I.A Inc_Broker_Scorecard.pptx
+++ b/generated/Tier 1 Broker Scorecards/A.S.I.A Inc_Broker_Scorecard.pptx
@@ -3357,7 +3357,7 @@
                         <a:rPr sz="800">
                           <a:latin typeface="Segoe UI"/>
                         </a:rPr>
-                        <a:t>$2,385,931.63 / $4,118,842.27 / $2,129,359.97</a:t>
+                        <a:t>$2,385,931.63 / $4,119,392.27 / $2,129,909.97</a:t>
                       </a:r>
                     </a:p>
                   </a:txBody>
@@ -3394,7 +3394,7 @@
                         <a:rPr sz="900">
                           <a:latin typeface="Segoe UI"/>
                         </a:rPr>
-                        <a:t>Tier 1  |  6.45% / 15.00%</a:t>
+                        <a:t>Tier 1  |  6.50% / 15.00%</a:t>
                       </a:r>
                     </a:p>
                   </a:txBody>
@@ -3431,7 +3431,7 @@
                         <a:rPr sz="900">
                           <a:latin typeface="Segoe UI"/>
                         </a:rPr>
-                        <a:t>$3,340,304.28  (63.7% achieved)</a:t>
+                        <a:t>$3,340,304.28  (63.8% achieved)</a:t>
                       </a:r>
                     </a:p>
                   </a:txBody>
@@ -3653,7 +3653,7 @@
                         <a:rPr sz="900">
                           <a:latin typeface="Segoe UI"/>
                         </a:rPr>
-                        <a:t>Fleet Subs: 88  |  Binds: 3</a:t>
+                        <a:t>Fleet Subs: 89  |  Binds: 3</a:t>
                       </a:r>
                     </a:p>
                   </a:txBody>
@@ -3690,7 +3690,7 @@
                         <a:rPr sz="900">
                           <a:latin typeface="Segoe UI"/>
                         </a:rPr>
-                        <a:t>Fleet Bound Premium: $209,200.82</a:t>
+                        <a:t>Fleet Bound Premium: $208,790.43</a:t>
                       </a:r>
                     </a:p>
                   </a:txBody>
@@ -3766,7 +3766,7 @@
                         <a:rPr sz="900">
                           <a:latin typeface="Segoe UI"/>
                         </a:rPr>
-                        <a:t>Non-Fleet Subs: 905  |  Binds: 61</a:t>
+                        <a:t>Non-Fleet Subs: 911  |  Binds: 62</a:t>
                       </a:r>
                     </a:p>
                   </a:txBody>
@@ -3803,7 +3803,7 @@
                         <a:rPr sz="900">
                           <a:latin typeface="Segoe UI"/>
                         </a:rPr>
-                        <a:t>Non-Fleet Bound Premium: $1,920,159.15</a:t>
+                        <a:t>Non-Fleet Bound Premium: $1,921,119.54</a:t>
                       </a:r>
                     </a:p>
                   </a:txBody>
@@ -4428,7 +4428,7 @@
                           </a:solidFill>
                           <a:latin typeface="Segoe UI"/>
                         </a:rPr>
-                        <a:t>240</a:t>
+                        <a:t>247</a:t>
                       </a:r>
                     </a:p>
                   </a:txBody>
@@ -4624,7 +4624,7 @@
                           </a:solidFill>
                           <a:latin typeface="Segoe UI"/>
                         </a:rPr>
-                        <a:t>13.7%</a:t>
+                        <a:t>14.1%</a:t>
                       </a:r>
                     </a:p>
                   </a:txBody>
@@ -4707,7 +4707,7 @@
                           </a:solidFill>
                           <a:latin typeface="Segoe UI"/>
                         </a:rPr>
-                        <a:t>7.5%</a:t>
+                        <a:t>7.3%</a:t>
                       </a:r>
                     </a:p>
                   </a:txBody>
@@ -4906,7 +4906,7 @@
                           </a:solidFill>
                           <a:latin typeface="Segoe UI"/>
                         </a:rPr>
-                        <a:t>36</a:t>
+                        <a:t>37</a:t>
                       </a:r>
                     </a:p>
                   </a:txBody>
@@ -5262,7 +5262,7 @@
                           </a:solidFill>
                           <a:latin typeface="Segoe UI"/>
                         </a:rPr>
-                        <a:t>$360.0K</a:t>
+                        <a:t>$360.5K</a:t>
                       </a:r>
                     </a:p>
                   </a:txBody>

--- a/generated/Tier 1 Broker Scorecards/A.S.I.A Inc_Broker_Scorecard.pptx
+++ b/generated/Tier 1 Broker Scorecards/A.S.I.A Inc_Broker_Scorecard.pptx
@@ -3394,7 +3394,7 @@
                         <a:rPr sz="900">
                           <a:latin typeface="Segoe UI"/>
                         </a:rPr>
-                        <a:t>Tier 1  |  6.50% / 15.00%</a:t>
+                        <a:t>Tier 1  |  6.36% / 15.00%</a:t>
                       </a:r>
                     </a:p>
                   </a:txBody>
@@ -3690,7 +3690,7 @@
                         <a:rPr sz="900">
                           <a:latin typeface="Segoe UI"/>
                         </a:rPr>
-                        <a:t>Fleet Bound Premium: $208,790.43</a:t>
+                        <a:t>Fleet Bound Premium: $211,928.48</a:t>
                       </a:r>
                     </a:p>
                   </a:txBody>
@@ -3727,7 +3727,7 @@
                         <a:rPr sz="900">
                           <a:latin typeface="Segoe UI"/>
                         </a:rPr>
-                        <a:t>Fleet Book %: 9.8%</a:t>
+                        <a:t>Fleet Book %: 10.0%</a:t>
                       </a:r>
                     </a:p>
                   </a:txBody>
@@ -3766,7 +3766,7 @@
                         <a:rPr sz="900">
                           <a:latin typeface="Segoe UI"/>
                         </a:rPr>
-                        <a:t>Non-Fleet Subs: 911  |  Binds: 62</a:t>
+                        <a:t>Non-Fleet Subs: 918  |  Binds: 61</a:t>
                       </a:r>
                     </a:p>
                   </a:txBody>
@@ -3803,7 +3803,7 @@
                         <a:rPr sz="900">
                           <a:latin typeface="Segoe UI"/>
                         </a:rPr>
-                        <a:t>Non-Fleet Bound Premium: $1,921,119.54</a:t>
+                        <a:t>Non-Fleet Bound Premium: $1,917,981.49</a:t>
                       </a:r>
                     </a:p>
                   </a:txBody>
@@ -3840,7 +3840,7 @@
                         <a:rPr sz="900">
                           <a:latin typeface="Segoe UI"/>
                         </a:rPr>
-                        <a:t>Non-Fleet Book %: 90.2%</a:t>
+                        <a:t>Non-Fleet Book %: 90.0%</a:t>
                       </a:r>
                     </a:p>
                   </a:txBody>
@@ -4428,7 +4428,7 @@
                           </a:solidFill>
                           <a:latin typeface="Segoe UI"/>
                         </a:rPr>
-                        <a:t>247</a:t>
+                        <a:t>254</a:t>
                       </a:r>
                     </a:p>
                   </a:txBody>
@@ -4624,7 +4624,7 @@
                           </a:solidFill>
                           <a:latin typeface="Segoe UI"/>
                         </a:rPr>
-                        <a:t>14.1%</a:t>
+                        <a:t>13.7%</a:t>
                       </a:r>
                     </a:p>
                   </a:txBody>
@@ -4664,7 +4664,7 @@
                         <a:rPr sz="800">
                           <a:latin typeface="Segoe UI"/>
                         </a:rPr>
-                        <a:t>27.3%</a:t>
+                        <a:t>25.0%</a:t>
                       </a:r>
                     </a:p>
                   </a:txBody>
@@ -4707,7 +4707,7 @@
                           </a:solidFill>
                           <a:latin typeface="Segoe UI"/>
                         </a:rPr>
-                        <a:t>7.3%</a:t>
+                        <a:t>7.1%</a:t>
                       </a:r>
                     </a:p>
                   </a:txBody>
@@ -4906,7 +4906,7 @@
                           </a:solidFill>
                           <a:latin typeface="Segoe UI"/>
                         </a:rPr>
-                        <a:t>37</a:t>
+                        <a:t>36</a:t>
                       </a:r>
                     </a:p>
                   </a:txBody>
@@ -4943,7 +4943,7 @@
                         <a:rPr sz="800">
                           <a:latin typeface="Segoe UI"/>
                         </a:rPr>
-                        <a:t>12</a:t>
+                        <a:t>11</a:t>
                       </a:r>
                     </a:p>
                   </a:txBody>

--- a/generated/Tier 1 Broker Scorecards/A.S.I.A Inc_Broker_Scorecard.pptx
+++ b/generated/Tier 1 Broker Scorecards/A.S.I.A Inc_Broker_Scorecard.pptx
@@ -3394,7 +3394,7 @@
                         <a:rPr sz="900">
                           <a:latin typeface="Segoe UI"/>
                         </a:rPr>
-                        <a:t>Tier 1  |  6.36% / 15.00%</a:t>
+                        <a:t>Tier 1  |  6.32% / 15.00%</a:t>
                       </a:r>
                     </a:p>
                   </a:txBody>
@@ -3653,7 +3653,7 @@
                         <a:rPr sz="900">
                           <a:latin typeface="Segoe UI"/>
                         </a:rPr>
-                        <a:t>Fleet Subs: 89  |  Binds: 3</a:t>
+                        <a:t>Fleet Subs: 91  |  Binds: 3</a:t>
                       </a:r>
                     </a:p>
                   </a:txBody>
@@ -3766,7 +3766,7 @@
                         <a:rPr sz="900">
                           <a:latin typeface="Segoe UI"/>
                         </a:rPr>
-                        <a:t>Non-Fleet Subs: 918  |  Binds: 61</a:t>
+                        <a:t>Non-Fleet Subs: 921  |  Binds: 61</a:t>
                       </a:r>
                     </a:p>
                   </a:txBody>
@@ -4428,7 +4428,7 @@
                           </a:solidFill>
                           <a:latin typeface="Segoe UI"/>
                         </a:rPr>
-                        <a:t>254</a:t>
+                        <a:t>259</a:t>
                       </a:r>
                     </a:p>
                   </a:txBody>
@@ -4664,7 +4664,7 @@
                         <a:rPr sz="800">
                           <a:latin typeface="Segoe UI"/>
                         </a:rPr>
-                        <a:t>25.0%</a:t>
+                        <a:t>27.3%</a:t>
                       </a:r>
                     </a:p>
                   </a:txBody>
@@ -4707,7 +4707,7 @@
                           </a:solidFill>
                           <a:latin typeface="Segoe UI"/>
                         </a:rPr>
-                        <a:t>7.1%</a:t>
+                        <a:t>6.9%</a:t>
                       </a:r>
                     </a:p>
                   </a:txBody>
@@ -4943,7 +4943,7 @@
                         <a:rPr sz="800">
                           <a:latin typeface="Segoe UI"/>
                         </a:rPr>
-                        <a:t>11</a:t>
+                        <a:t>12</a:t>
                       </a:r>
                     </a:p>
                   </a:txBody>

--- a/generated/Tier 1 Broker Scorecards/A.S.I.A Inc_Broker_Scorecard.pptx
+++ b/generated/Tier 1 Broker Scorecards/A.S.I.A Inc_Broker_Scorecard.pptx
@@ -3357,7 +3357,7 @@
                         <a:rPr sz="800">
                           <a:latin typeface="Segoe UI"/>
                         </a:rPr>
-                        <a:t>$2,385,931.63 / $4,119,392.27 / $2,129,909.97</a:t>
+                        <a:t>$2,385,931.63 / $3,959,546.62 / $2,129,909.97</a:t>
                       </a:r>
                     </a:p>
                   </a:txBody>
@@ -3766,7 +3766,7 @@
                         <a:rPr sz="900">
                           <a:latin typeface="Segoe UI"/>
                         </a:rPr>
-                        <a:t>Non-Fleet Subs: 921  |  Binds: 61</a:t>
+                        <a:t>Non-Fleet Subs: 922  |  Binds: 61</a:t>
                       </a:r>
                     </a:p>
                   </a:txBody>
@@ -4428,7 +4428,7 @@
                           </a:solidFill>
                           <a:latin typeface="Segoe UI"/>
                         </a:rPr>
-                        <a:t>259</a:t>
+                        <a:t>260</a:t>
                       </a:r>
                     </a:p>
                   </a:txBody>
@@ -4500,9 +4500,12 @@
                       <a:pPr algn="ctr"/>
                       <a:r>
                         <a:rPr sz="800">
+                          <a:solidFill>
+                            <a:srgbClr val="DC2626"/>
+                          </a:solidFill>
                           <a:latin typeface="Segoe UI"/>
                         </a:rPr>
-                        <a:t/>
+                        <a:t>1</a:t>
                       </a:r>
                     </a:p>
                   </a:txBody>
